--- a/experiments/figures/hook_points.pptx
+++ b/experiments/figures/hook_points.pptx
@@ -502,7 +502,7 @@
           <a:p>
             <a:r>
               <a:rPr lang="en-US" dirty="0"/>
-              <a:t>Methods figure for the four-condition grid: original policy, fixed foveation (hook A), action repeat (hook B), fixed depth pruning (hook C). All shapes are native PowerPoint objects and can be edited directly.</a:t>
+              <a:t>Methods figure for the four-condition grid. Three of the four attach somewhere -- fixed foveation (hook A), action repeat (hook B), fixed depth pruning (hook C); the fourth, original policy, is the same loop with all three off. All shapes are native PowerPoint objects and can be edited directly.</a:t>
             </a:r>
             <a:endParaRPr lang="en-US" dirty="0"/>
           </a:p>
@@ -908,7 +908,7 @@
                 <a:ea typeface="Calibri" pitchFamily="34" charset="-122"/>
                 <a:cs typeface="Calibri" pitchFamily="34" charset="-120"/>
               </a:rPr>
-              <a:t>Where the four conditions attach</a:t>
+              <a:t>Where the three interventions attach</a:t>
             </a:r>
             <a:endParaRPr lang="en-US" sz="3200" dirty="0"/>
           </a:p>
@@ -947,7 +947,7 @@
                 <a:ea typeface="Calibri" pitchFamily="34" charset="-122"/>
                 <a:cs typeface="Calibri" pitchFamily="34" charset="-120"/>
               </a:rPr>
-              <a:t>Every hook attaches outside the frozen weights.  Original policy is this same loop with all three off.</a:t>
+              <a:t>Every hook attaches outside the frozen weights.  The fourth condition, Original policy, is this same loop with all three off.</a:t>
             </a:r>
             <a:endParaRPr lang="en-US" sz="1300" dirty="0"/>
           </a:p>
